--- a/level4/slides/Level4_Lesson2_Slides.pptx
+++ b/level4/slides/Level4_Lesson2_Slides.pptx
@@ -1046,7 +1046,7 @@
           <a:lstStyle/>
           <a:p>
             <a:r>
-              <a:t>"Hear it, say it" (3 min). Point to the script lines. wanna = want to: "I wanna fill out an application." gonna = going to: "My mother is gonna live with me." You can say want to and going to.</a:t>
+              <a:t>"Hear it, say it" (3 min). Point to the script lines. wanna = want to: "I want to fill out an application." gonna = going to: "My mother is going to live with me." You can say want to and going to.</a:t>
             </a:r>
           </a:p>
           <a:p>
@@ -1056,7 +1056,7 @@
           </a:p>
           <a:p>
             <a:r>
-              <a:t>Reductions: learners need to understand gonna and wanna; they can always say going to and want to.</a:t>
+              <a:t>Reductions: the listening says going to and want to. People often say gonna and wanna. Learners only need to recognize the short forms.</a:t>
             </a:r>
           </a:p>
           <a:p>
@@ -1486,7 +1486,7 @@
           </a:p>
           <a:p>
             <a:r>
-              <a:t>No speaker? Read the script with a volunteer at a natural, friendly speed, two times. Say gonna and wanna where the script has them.</a:t>
+              <a:t>No speaker? Read the script with a volunteer at a natural, friendly speed, two times. The script says going to and want to. People often say gonna and wanna; learners only need to recognize those words.</a:t>
             </a:r>
           </a:p>
           <a:p>
@@ -1521,7 +1521,7 @@
           </a:p>
           <a:p>
             <a:r>
-              <a:t>Marisol: Hi. I'm here about the two-bedroom apartment. I wanna fill out an application.</a:t>
+              <a:t>Marisol: Hi. I'm here about the two-bedroom apartment. I want to fill out an application.</a:t>
             </a:r>
           </a:p>
           <a:p>
@@ -1561,7 +1561,7 @@
           </a:p>
           <a:p>
             <a:r>
-              <a:t>Marisol: My apartment is too small. My mother is gonna live with me.</a:t>
+              <a:t>Marisol: My apartment is too small. My mother is going to live with me.</a:t>
             </a:r>
           </a:p>
           <a:p>
@@ -16712,6 +16712,17 @@
               <a:buNone/>
             </a:pPr>
             <a:r>
+              <a:rPr lang="en-US" sz="2000" dirty="0" b="1">
+                <a:solidFill>
+                  <a:srgbClr val="5B3FC4"/>
+                </a:solidFill>
+                <a:latin typeface="Lexend Deca" pitchFamily="34" charset="0"/>
+                <a:ea typeface="Lexend Deca" pitchFamily="34" charset="-122"/>
+                <a:cs typeface="Lexend Deca" pitchFamily="34" charset="-120"/>
+              </a:rPr>
+              <a:t>wanna</a:t>
+            </a:r>
+            <a:r>
               <a:rPr lang="en-US" sz="2000" dirty="0">
                 <a:solidFill>
                   <a:srgbClr val="1B2236"/>
@@ -16720,7 +16731,7 @@
                 <a:ea typeface="Lexend Deca" pitchFamily="34" charset="-122"/>
                 <a:cs typeface="Lexend Deca" pitchFamily="34" charset="-120"/>
               </a:rPr>
-              <a:t>You will hear </a:t>
+              <a:t> and </a:t>
             </a:r>
             <a:r>
               <a:rPr lang="en-US" sz="2000" dirty="0" b="1">
@@ -16731,7 +16742,7 @@
                 <a:ea typeface="Lexend Deca" pitchFamily="34" charset="-122"/>
                 <a:cs typeface="Lexend Deca" pitchFamily="34" charset="-120"/>
               </a:rPr>
-              <a:t>wanna</a:t>
+              <a:t>gonna</a:t>
             </a:r>
             <a:r>
               <a:rPr lang="en-US" sz="2000" dirty="0">
@@ -16742,29 +16753,7 @@
                 <a:ea typeface="Lexend Deca" pitchFamily="34" charset="-122"/>
                 <a:cs typeface="Lexend Deca" pitchFamily="34" charset="-120"/>
               </a:rPr>
-              <a:t> and </a:t>
-            </a:r>
-            <a:r>
-              <a:rPr lang="en-US" sz="2000" dirty="0" b="1">
-                <a:solidFill>
-                  <a:srgbClr val="5B3FC4"/>
-                </a:solidFill>
-                <a:latin typeface="Lexend Deca" pitchFamily="34" charset="0"/>
-                <a:ea typeface="Lexend Deca" pitchFamily="34" charset="-122"/>
-                <a:cs typeface="Lexend Deca" pitchFamily="34" charset="-120"/>
-              </a:rPr>
-              <a:t>gonna</a:t>
-            </a:r>
-            <a:r>
-              <a:rPr lang="en-US" sz="2000" dirty="0">
-                <a:solidFill>
-                  <a:srgbClr val="1B2236"/>
-                </a:solidFill>
-                <a:latin typeface="Lexend Deca" pitchFamily="34" charset="0"/>
-                <a:ea typeface="Lexend Deca" pitchFamily="34" charset="-122"/>
-                <a:cs typeface="Lexend Deca" pitchFamily="34" charset="-120"/>
-              </a:rPr>
-              <a:t>.</a:t>
+              <a:t> are short forms. This listening uses the full forms.</a:t>
             </a:r>
             <a:endParaRPr lang="en-US" sz="2000" dirty="0"/>
           </a:p>
@@ -16941,7 +16930,7 @@
                 <a:ea typeface="Lexend Deca" pitchFamily="34" charset="-122"/>
                 <a:cs typeface="Lexend Deca" pitchFamily="34" charset="-120"/>
               </a:rPr>
-              <a:t>wanna</a:t>
+              <a:t>want to</a:t>
             </a:r>
             <a:r>
               <a:rPr lang="en-US" sz="1800" dirty="0" b="1">
@@ -17028,7 +17017,7 @@
                 <a:ea typeface="Lexend Deca" pitchFamily="34" charset="-122"/>
                 <a:cs typeface="Lexend Deca" pitchFamily="34" charset="-120"/>
               </a:rPr>
-              <a:t>gonna</a:t>
+              <a:t>going to</a:t>
             </a:r>
             <a:r>
               <a:rPr lang="en-US" sz="1800" dirty="0" b="1">

--- a/level4/slides/Level4_Lesson2_Slides.pptx
+++ b/level4/slides/Level4_Lesson2_Slides.pptx
@@ -1516,7 +1516,7 @@
           </a:p>
           <a:p>
             <a:r>
-              <a:t>Mr. Chen: Good afternoon. Welcome to Park View Apartments. How can I help you?</a:t>
+              <a:t>Mr. Chen: Good afternoon. Welcome to Parkview Apartments. How can I help you?</a:t>
             </a:r>
           </a:p>
           <a:p>
@@ -1531,7 +1531,7 @@
           </a:p>
           <a:p>
             <a:r>
-              <a:t>Marisol: It's 418 Elm Street, apartment 3.</a:t>
+              <a:t>Marisol: It's four eighteen Elm Street, apartment 3.</a:t>
             </a:r>
           </a:p>
           <a:p>
@@ -1586,7 +1586,7 @@
           </a:p>
           <a:p>
             <a:r>
-              <a:t>Mr. Chen: And your start date at the clinic? March what?</a:t>
+              <a:t>Mr. Chen: And what day in March did you start at the clinic?</a:t>
             </a:r>
           </a:p>
           <a:p>
@@ -2171,7 +2171,7 @@
           </a:p>
           <a:p>
             <a:r>
-              <a:t>Read the three lines under "Today you will". Give one quick example of each: "How long have you lived here?" • "I've lived here for two years. / since 2024." • "Current address: 418 Elm Street."</a:t>
+              <a:t>Read the three lines under "Today you will". Give one quick example of each: "How long have you lived here?" • "I've lived here for two years. / since 2024." • "Current address: four eighteen Elm Street."</a:t>
             </a:r>
           </a:p>
           <a:p>
@@ -13539,7 +13539,7 @@
                 <a:ea typeface="Lexend Deca" pitchFamily="34" charset="-122"/>
                 <a:cs typeface="Lexend Deca" pitchFamily="34" charset="-120"/>
               </a:rPr>
-              <a:t>Park View</a:t>
+              <a:t>Parkview</a:t>
             </a:r>
             <a:endParaRPr lang="en-US" sz="1400" dirty="0" b="1"/>
           </a:p>
@@ -13768,7 +13768,7 @@
                 <a:ea typeface="Lexend Deca" pitchFamily="34" charset="-122"/>
                 <a:cs typeface="Lexend Deca" pitchFamily="34" charset="-120"/>
               </a:rPr>
-              <a:t>Park View Apartments</a:t>
+              <a:t>Parkview Apartments</a:t>
             </a:r>
             <a:endParaRPr lang="en-US" sz="1400" dirty="0" b="1"/>
           </a:p>
@@ -29167,7 +29167,7 @@
                 <a:ea typeface="Lexend Deca" pitchFamily="34" charset="-122"/>
                 <a:cs typeface="Lexend Deca" pitchFamily="34" charset="-120"/>
               </a:rPr>
-              <a:t>Park View Apartments:</a:t>
+              <a:t>Parkview Apartments:</a:t>
             </a:r>
             <a:endParaRPr lang="en-US" sz="2000" dirty="0" b="1"/>
           </a:p>

--- a/level4/slides/Level4_Lesson2_Slides.pptx
+++ b/level4/slides/Level4_Lesson2_Slides.pptx
@@ -536,7 +536,7 @@
           </a:p>
           <a:p>
             <a:r>
-              <a:t>Audio: the listening audio for this lesson (about 1:45) is coming soon. It will use computer-generated voices (Chatterbox TTS cloned from synthetic Kokoro-82M reference clips); no recordings of real people. Until it is ready, read the listening script (in the notes of the Before You Listen slide) with a volunteer. The names and the story are invented.</a:t>
+              <a:t>Audio: synthetic voices, computer-generated (Chatterbox TTS cloned from Kokoro-82M reference clips). No recordings of real people. The names and the story are invented.</a:t>
             </a:r>
           </a:p>
           <a:p>
@@ -1481,7 +1481,7 @@
           </a:p>
           <a:p>
             <a:r>
-              <a:t>The audio (about 1:45) is coming soon. When it is ready, it plays the conversation once; press play again for play 2. Until then, read the listening script (at the end of these notes) with a volunteer.</a:t>
+              <a:t>The audio (L4_L2_listening.mp3, about 1:55) plays the conversation once. Press play again for play 2. A third play is fine if the class needs it.</a:t>
             </a:r>
           </a:p>
           <a:p>
@@ -1491,7 +1491,7 @@
           </a:p>
           <a:p>
             <a:r>
-              <a:t>Audio: the listening audio for this lesson (about 1:45) is coming soon. It will use computer-generated voices (Chatterbox TTS cloned from synthetic Kokoro-82M reference clips); no recordings of real people. Until it is ready, read the listening script (in the notes of the Before You Listen slide) with a volunteer. The names and the story are invented.</a:t>
+              <a:t>Audio: synthetic voices, computer-generated (Chatterbox TTS cloned from Kokoro-82M reference clips). No recordings of real people. The names and the story are invented.</a:t>
             </a:r>
           </a:p>
           <a:p>
@@ -1502,126 +1502,6 @@
           <a:p>
             <a:r>
               <a:t>Picture: Twemoji graphics by Twitter, Inc. and other contributors (https://github.com/jdecked/twemoji), CC BY 4.0 (https://creativecommons.org/licenses/by/4.0/); resized and combined, with signs and labels (images/CREDITS.md).</a:t>
-            </a:r>
-          </a:p>
-          <a:p>
-            <a:r>
-              <a:t>Listening script (the audio is coming soon; until then, read it aloud with a volunteer at a normal, friendly speed):</a:t>
-            </a:r>
-          </a:p>
-          <a:p>
-            <a:r>
-              <a:t>Narrator: Lesson two. Marisol is at a leasing office. She wants to rent an apartment, and Mr. Chen helps her.</a:t>
-            </a:r>
-          </a:p>
-          <a:p>
-            <a:r>
-              <a:t>Mr. Chen: Good afternoon. Welcome to Parkview Apartments. How can I help you?</a:t>
-            </a:r>
-          </a:p>
-          <a:p>
-            <a:r>
-              <a:t>Marisol: Hi. I'm here about the two-bedroom apartment. I want to fill out an application.</a:t>
-            </a:r>
-          </a:p>
-          <a:p>
-            <a:r>
-              <a:t>Mr. Chen: Great. Let's do it together. What's your current address?</a:t>
-            </a:r>
-          </a:p>
-          <a:p>
-            <a:r>
-              <a:t>Marisol: It's four eighteen Elm Street, apartment 3.</a:t>
-            </a:r>
-          </a:p>
-          <a:p>
-            <a:r>
-              <a:t>Mr. Chen: And how long have you lived there?</a:t>
-            </a:r>
-          </a:p>
-          <a:p>
-            <a:r>
-              <a:t>Marisol: I've lived there for two years.</a:t>
-            </a:r>
-          </a:p>
-          <a:p>
-            <a:r>
-              <a:t>Mr. Chen: OK. And your previous address?</a:t>
-            </a:r>
-          </a:p>
-          <a:p>
-            <a:r>
-              <a:t>Marisol: Before that, I lived on Lake Road with my cousins. I lived there for three years.</a:t>
-            </a:r>
-          </a:p>
-          <a:p>
-            <a:r>
-              <a:t>Mr. Chen: Why are you moving?</a:t>
-            </a:r>
-          </a:p>
-          <a:p>
-            <a:r>
-              <a:t>Marisol: My apartment is too small. My mother is going to live with me.</a:t>
-            </a:r>
-          </a:p>
-          <a:p>
-            <a:r>
-              <a:t>Mr. Chen: I see. Now, your job. Who's your employer?</a:t>
-            </a:r>
-          </a:p>
-          <a:p>
-            <a:r>
-              <a:t>Marisol: Green Valley Clinic. I'm a medical assistant.</a:t>
-            </a:r>
-          </a:p>
-          <a:p>
-            <a:r>
-              <a:t>Mr. Chen: How long have you worked there?</a:t>
-            </a:r>
-          </a:p>
-          <a:p>
-            <a:r>
-              <a:t>Marisol: Since March 2022. Before that, I worked at a bakery for two years.</a:t>
-            </a:r>
-          </a:p>
-          <a:p>
-            <a:r>
-              <a:t>Mr. Chen: And what day in March did you start at the clinic?</a:t>
-            </a:r>
-          </a:p>
-          <a:p>
-            <a:r>
-              <a:t>Marisol: March fifteenth.</a:t>
-            </a:r>
-          </a:p>
-          <a:p>
-            <a:r>
-              <a:t>Mr. Chen: Thank you. We also need one reference. Not a family member, please.</a:t>
-            </a:r>
-          </a:p>
-          <a:p>
-            <a:r>
-              <a:t>Marisol: Can I give my supervisor's name? She's known me since I started.</a:t>
-            </a:r>
-          </a:p>
-          <a:p>
-            <a:r>
-              <a:t>Mr. Chen: Sure, that's fine. And will you have a roommate?</a:t>
-            </a:r>
-          </a:p>
-          <a:p>
-            <a:r>
-              <a:t>Marisol: No, just my mother. When can we move in?</a:t>
-            </a:r>
-          </a:p>
-          <a:p>
-            <a:r>
-              <a:t>Mr. Chen: The apartment is ready on June first. The lease is for one year.</a:t>
-            </a:r>
-          </a:p>
-          <a:p>
-            <a:r>
-              <a:t>Narrator: That's the end of the listening.</a:t>
             </a:r>
           </a:p>
         </p:txBody>
@@ -12107,7 +11987,7 @@
                 <a:ea typeface="Lexend Deca" pitchFamily="34" charset="-122"/>
                 <a:cs typeface="Lexend Deca" pitchFamily="34" charset="-120"/>
               </a:rPr>
-              <a:t>Audio (about 1:45): coming soon.</a:t>
+              <a:t>Audio: about 1:55. It plays once.</a:t>
             </a:r>
             <a:endParaRPr lang="en-US" sz="2200" dirty="0"/>
           </a:p>
@@ -31683,7 +31563,7 @@
                 <a:ea typeface="Lexend Deca" pitchFamily="34" charset="-122"/>
                 <a:cs typeface="Lexend Deca" pitchFamily="34" charset="-120"/>
               </a:rPr>
-              <a:t>Audio (coming soon): synthetic voices made with Chatterbox TTS (MIT License), cloned from short synthetic reference clips made with Kokoro-82M (Apache License 2.0). No recordings of real people. Each file will carry an inaudible Perth watermark marking it as AI-generated. Font: Lexend Deca (OFL 1.1).</a:t>
+              <a:t>Audio: synthetic voices made with Chatterbox TTS (MIT License), cloned from short synthetic reference clips made with Kokoro-82M (Apache License 2.0). No recordings of real people were used. Each file carries an inaudible Perth watermark marking it as AI-generated. Font: Lexend Deca (OFL 1.1).</a:t>
             </a:r>
             <a:endParaRPr lang="en-US" sz="1350" dirty="0" b="0"/>
           </a:p>

--- a/level4/slides/Level4_Lesson2_Slides.pptx
+++ b/level4/slides/Level4_Lesson2_Slides.pptx
@@ -1056,7 +1056,7 @@
           </a:p>
           <a:p>
             <a:r>
-              <a:t>Reductions: the listening says going to and want to. People often say gonna and wanna. Learners only need to recognize the short forms.</a:t>
+              <a:t>Everyday English: people often say gonna (going to) and wanna (want to). Learners will hear them often. They are fine in casual talk; in writing, at a job interview, or in a formal email, use going to and want to. The listening uses the full forms.</a:t>
             </a:r>
           </a:p>
           <a:p>
@@ -16600,6 +16600,28 @@
                 <a:ea typeface="Lexend Deca" pitchFamily="34" charset="-122"/>
                 <a:cs typeface="Lexend Deca" pitchFamily="34" charset="-120"/>
               </a:rPr>
+              <a:t>gonna</a:t>
+            </a:r>
+            <a:r>
+              <a:rPr lang="en-US" sz="2000" dirty="0">
+                <a:solidFill>
+                  <a:srgbClr val="1B2236"/>
+                </a:solidFill>
+                <a:latin typeface="Lexend Deca" pitchFamily="34" charset="0"/>
+                <a:ea typeface="Lexend Deca" pitchFamily="34" charset="-122"/>
+                <a:cs typeface="Lexend Deca" pitchFamily="34" charset="-120"/>
+              </a:rPr>
+              <a:t> = going to, </a:t>
+            </a:r>
+            <a:r>
+              <a:rPr lang="en-US" sz="2000" dirty="0" b="1">
+                <a:solidFill>
+                  <a:srgbClr val="5B3FC4"/>
+                </a:solidFill>
+                <a:latin typeface="Lexend Deca" pitchFamily="34" charset="0"/>
+                <a:ea typeface="Lexend Deca" pitchFamily="34" charset="-122"/>
+                <a:cs typeface="Lexend Deca" pitchFamily="34" charset="-120"/>
+              </a:rPr>
               <a:t>wanna</a:t>
             </a:r>
             <a:r>
@@ -16611,29 +16633,7 @@
                 <a:ea typeface="Lexend Deca" pitchFamily="34" charset="-122"/>
                 <a:cs typeface="Lexend Deca" pitchFamily="34" charset="-120"/>
               </a:rPr>
-              <a:t> and </a:t>
-            </a:r>
-            <a:r>
-              <a:rPr lang="en-US" sz="2000" dirty="0" b="1">
-                <a:solidFill>
-                  <a:srgbClr val="5B3FC4"/>
-                </a:solidFill>
-                <a:latin typeface="Lexend Deca" pitchFamily="34" charset="0"/>
-                <a:ea typeface="Lexend Deca" pitchFamily="34" charset="-122"/>
-                <a:cs typeface="Lexend Deca" pitchFamily="34" charset="-120"/>
-              </a:rPr>
-              <a:t>gonna</a:t>
-            </a:r>
-            <a:r>
-              <a:rPr lang="en-US" sz="2000" dirty="0">
-                <a:solidFill>
-                  <a:srgbClr val="1B2236"/>
-                </a:solidFill>
-                <a:latin typeface="Lexend Deca" pitchFamily="34" charset="0"/>
-                <a:ea typeface="Lexend Deca" pitchFamily="34" charset="-122"/>
-                <a:cs typeface="Lexend Deca" pitchFamily="34" charset="-120"/>
-              </a:rPr>
-              <a:t> are short forms. This listening uses the full forms.</a:t>
+              <a:t> = want to: fine in everyday talk.</a:t>
             </a:r>
             <a:endParaRPr lang="en-US" sz="2000" dirty="0"/>
           </a:p>
